--- a/data/sample_talk.pptx
+++ b/data/sample_talk.pptx
@@ -6465,7 +6465,7 @@
                 </a:solidFill>
                 <a:latin typeface="Microsoft JhengHei"/>
               </a:rPr>
-              <a:t>•  n8n 做導演，桌面 PowerPoint 跟住翻頁</a:t>
+              <a:t>•  本機導演控制節奏，桌面 PowerPoint 跟住翻頁</a:t>
             </a:r>
           </a:p>
           <a:p>
